--- a/slides/block3b.pptx
+++ b/slides/block3b.pptx
@@ -30,6 +30,7 @@
     <p:sldId id="278" r:id="rId30"/>
     <p:sldId id="279" r:id="rId31"/>
     <p:sldId id="280" r:id="rId32"/>
+    <p:sldId id="281" r:id="rId33"/>
   </p:sldIdLst>
   <p:sldSz cx="12192000" cy="6858000" type="screen4x3"/>
   <p:notesSz cx="6858000" cy="9144000"/>
@@ -526,7 +527,7 @@
           <a:lstStyle/>
           <a:p>
             <a:r>
-              <a:t>3A built the numerator. This block builds the denominator, discounts both, and then does the only arithmetic in the course they will be asked to reproduce by hand.</a:t>
+              <a:t>Sessions 3 and 4 built the numerator, in principle and then on their own ward. This session builds the denominator, discounts both, and then does the only arithmetic in the day they will be asked to reproduce by hand.</a:t>
             </a:r>
           </a:p>
         </p:txBody>
@@ -1016,7 +1017,7 @@
           <a:lstStyle/>
           <a:p>
             <a:r>
-              <a:t>Connect explicitly to the CE plane widget from Block 2. They have seen this quadrant interactively. Here it is as a row in a table, which is how it appears in a real paper.</a:t>
+              <a:t>The cost-effectiveness plane widget is four slides ahead; say that they will see this quadrant interactively then. Here it is as a row in a table, which is how it appears in a real paper.</a:t>
             </a:r>
           </a:p>
         </p:txBody>
@@ -1156,7 +1157,7 @@
           <a:lstStyle/>
           <a:p>
             <a:r>
-              <a:t>Where Block 2 and Block 3 finally join. Change λ and the answer changes, not the analysis. Make them say which strategy wins at ₹80,000 before you show it.</a:t>
+              <a:t>Be explicit that λ is on loan here. Ranking needs a number, so we use one and interrogate it after the break. Change λ and the answer changes while the analysis does not: make them say which strategy wins at ₹80,000 before you show it. That is the hook into Session 6.</a:t>
             </a:r>
           </a:p>
         </p:txBody>
@@ -1226,7 +1227,7 @@
           <a:lstStyle/>
           <a:p>
             <a:r>
-              <a:t>A short revisit, since they met this in Block 2. The new thing to point at is the net monetary benefit row, which the next slide explains.</a:t>
+              <a:t>First time they meet the plane interactively. Give them two minutes on their phones: move the threshold line and watch points cross it. Then point at the net monetary benefit row, which the next slide explains.</a:t>
             </a:r>
           </a:p>
         </p:txBody>
@@ -1576,7 +1577,7 @@
           <a:lstStyle/>
           <a:p>
             <a:r>
-              <a:t>If you are short of time, the two lines that must survive are "average ratios are meaningless" and the falling-ICER rule for extended dominance.</a:t>
+              <a:t>Work the arithmetic on the board if there is one: the incremental cost is the same in both rows, so the whole gap is the denominator. ₹1,78,877 against ₹1,34,413 is a third, produced entirely by which trial you believe. Then send them to their own paper: what is its ICER, and what one number would you have to disbelieve to change it?</a:t>
             </a:r>
           </a:p>
         </p:txBody>
@@ -1646,7 +1647,7 @@
           <a:lstStyle/>
           <a:p>
             <a:r>
-              <a:t>Note the last entry. Be explicit about which numbers are real and which are teaching constructions. It models the honesty the day is asking of them.</a:t>
+              <a:t>If you are short of time, the two lines that must survive are "average ratios are meaningless" and the falling-ICER rule for extended dominance.</a:t>
             </a:r>
           </a:p>
         </p:txBody>
@@ -1716,7 +1717,77 @@
           <a:lstStyle/>
           <a:p>
             <a:r>
-              <a:t>Deliberately unsettling. They have just done the arithmetic carefully and correctly. Now tell them the answer has a confidence region they have not seen yet.</a:t>
+              <a:t>Note the last entry. Be explicit about which numbers are real and which are teaching constructions. It models the honesty the day is asking of them.</a:t>
+            </a:r>
+          </a:p>
+        </p:txBody>
+      </p:sp>
+      <p:sp>
+        <p:nvSpPr>
+          <p:cNvPr id="4" name="Slide Number Placeholder 3"/>
+          <p:cNvSpPr>
+            <a:spLocks noGrp="1"/>
+          </p:cNvSpPr>
+          <p:nvPr>
+            <p:ph type="sldNum" idx="5" sz="quarter"/>
+          </p:nvPr>
+        </p:nvSpPr>
+        <p:spPr/>
+      </p:sp>
+    </p:spTree>
+  </p:cSld>
+  <p:clrMapOvr>
+    <a:masterClrMapping/>
+  </p:clrMapOvr>
+</p:notes>
+</file>
+
+<file path=ppt/notesSlides/notesSlide26.xml><?xml version="1.0" encoding="utf-8"?>
+<p:notes xmlns:a="http://schemas.openxmlformats.org/drawingml/2006/main" xmlns:p="http://schemas.openxmlformats.org/presentationml/2006/main" xmlns:r="http://schemas.openxmlformats.org/officeDocument/2006/relationships">
+  <p:cSld>
+    <p:spTree>
+      <p:nvGrpSpPr>
+        <p:cNvPr id="1" name=""/>
+        <p:cNvGrpSpPr/>
+        <p:nvPr/>
+      </p:nvGrpSpPr>
+      <p:grpSpPr>
+        <a:xfrm>
+          <a:off x="0" y="0"/>
+          <a:ext cx="0" cy="0"/>
+          <a:chOff x="0" y="0"/>
+          <a:chExt cx="0" cy="0"/>
+        </a:xfrm>
+      </p:grpSpPr>
+      <p:sp>
+        <p:nvSpPr>
+          <p:cNvPr id="2" name="Slide Image Placeholder 1"/>
+          <p:cNvSpPr>
+            <a:spLocks noGrp="1"/>
+          </p:cNvSpPr>
+          <p:nvPr>
+            <p:ph type="sldImg" idx="2"/>
+          </p:nvPr>
+        </p:nvSpPr>
+        <p:spPr/>
+      </p:sp>
+      <p:sp>
+        <p:nvSpPr>
+          <p:cNvPr id="3" name="Notes Placeholder 2"/>
+          <p:cNvSpPr>
+            <a:spLocks noGrp="1"/>
+          </p:cNvSpPr>
+          <p:nvPr>
+            <p:ph type="body" idx="3" sz="quarter"/>
+          </p:nvPr>
+        </p:nvSpPr>
+        <p:spPr/>
+        <p:txBody>
+          <a:bodyPr/>
+          <a:lstStyle/>
+          <a:p>
+            <a:r>
+              <a:t>This is the pivot of the day. Everything so far has been machinery; the next session is judgement. Ask them, before the slide, what ₹2,12,307 might be a measurement of. Most will guess a budget figure, which it is not.</a:t>
             </a:r>
           </a:p>
         </p:txBody>
@@ -2136,7 +2207,7 @@
           <a:lstStyle/>
           <a:p>
             <a:r>
-              <a:t>Third time you have raised this: Block 1, Block 2, now with the mechanism. That repetition is deliberate. It is the most durable confusion in this subject for community medicine trainees.</a:t>
+              <a:t>Second time you have raised this: Session 2 warned about it, here is the mechanism, and Session 6 shows what it does to a published ranking. That repetition is deliberate. It is the most durable confusion in this subject for community medicine trainees.</a:t>
             </a:r>
           </a:p>
         </p:txBody>
@@ -5250,7 +5321,7 @@
                 </a:solidFill>
                 <a:latin typeface="Arial"/>
               </a:rPr>
-              <a:t>ECONOMIC EVALUATION IN HEALTH · FACULTY WORKSHOP · SESSION 6</a:t>
+              <a:t>ECONOMIC EVALUATION IN HEALTH · FACULTY WORKSHOP · SESSION 5</a:t>
             </a:r>
           </a:p>
         </p:txBody>
@@ -11640,9 +11711,9 @@
                 <a:tableStyleId>{5C22544A-7EE6-4342-B048-85BDC9FD1C3A}</a:tableStyleId>
               </a:tblPr>
               <a:tblGrid>
-                <a:gridCol w="3672334"/>
-                <a:gridCol w="3833812"/>
-                <a:gridCol w="3580954"/>
+                <a:gridCol w="3618309"/>
+                <a:gridCol w="3777258"/>
+                <a:gridCol w="3691533"/>
               </a:tblGrid>
               <a:tr h="527000">
                 <a:tc>
@@ -11734,7 +11805,7 @@
                           </a:solidFill>
                           <a:latin typeface="Arial"/>
                         </a:rPr>
-                        <a:t> ≈ ₹2,12,307</a:t>
+                        <a:t> ≈ ₹2,12,307, for now</a:t>
                       </a:r>
                     </a:p>
                   </a:txBody>
@@ -11815,6 +11886,9 @@
                           <a:solidFill>
                             <a:srgbClr val="FFFFFF"/>
                           </a:solidFill>
+                          <a:highlight>
+                            <a:srgbClr val="17683C"/>
+                          </a:highlight>
                           <a:latin typeface="Arial"/>
                         </a:rPr>
                         <a:t>accept</a:t>
@@ -11894,6 +11968,9 @@
                           <a:solidFill>
                             <a:srgbClr val="FFFFFF"/>
                           </a:solidFill>
+                          <a:highlight>
+                            <a:srgbClr val="17683C"/>
+                          </a:highlight>
                           <a:latin typeface="Arial"/>
                         </a:rPr>
                         <a:t>accept, and the last that qualifies</a:t>
@@ -12076,7 +12153,7 @@
                 </a:solidFill>
                 <a:latin typeface="Arial"/>
               </a:rPr>
-              <a:t>At a lower threshold, say a supply-side estimate of ₹80,000, you would stop at VIA every five years. The question is not "which is best" but "how far up can we afford to go". That is incremental analysis in one sentence.</a:t>
+              <a:t>Borrow λ for now: ₹2 lakh per QALY, near a published Indian estimate. At ₹80,000 instead you would stop at VIA every five years. The question is not "which is best" but "how far up can we afford to go", and where that λ comes from is Session 6.</a:t>
             </a:r>
           </a:p>
         </p:txBody>
@@ -12353,7 +12430,7 @@
                 </a:solidFill>
                 <a:latin typeface="Arial"/>
               </a:rPr>
-              <a:t>Same widget as this morning, now with the ranking in mind: the frontier is the set of points you would climb, and dominance is visible as a point below and to the right of another.</a:t>
+              <a:t>The ranking you just did, drawn. The frontier is the set of points you would climb, and a dominant option sits below and to the right of another. Drag λ and the verdict changes.</a:t>
             </a:r>
           </a:p>
         </p:txBody>
@@ -12554,7 +12631,7 @@
                 </a:solidFill>
                 <a:latin typeface="Arial"/>
               </a:rPr>
-              <a:t>By the end of this block</a:t>
+              <a:t>By the end of this session</a:t>
             </a:r>
           </a:p>
         </p:txBody>
@@ -15009,7 +15086,7 @@
                 </a:solidFill>
                 <a:latin typeface="Arial"/>
               </a:rPr>
-              <a:t>Recap</a:t>
+              <a:t>The same arithmetic, on a drug</a:t>
             </a:r>
           </a:p>
         </p:txBody>
@@ -15022,8 +15099,8 @@
         </p:nvSpPr>
         <p:spPr>
           <a:xfrm>
-            <a:off x="1288703" y="1142050"/>
-            <a:ext cx="10350847" cy="959048"/>
+            <a:off x="552450" y="1142050"/>
+            <a:ext cx="11087100" cy="781645"/>
           </a:xfrm>
           <a:prstGeom prst="rect">
             <a:avLst/>
@@ -15038,7 +15115,7 @@
           <a:p>
             <a:pPr algn="l">
               <a:lnSpc>
-                <a:spcPct val="112500"/>
+                <a:spcPct val="116700"/>
               </a:lnSpc>
               <a:spcAft>
                 <a:spcPts val="0"/>
@@ -15046,45 +15123,383 @@
               <a:buNone/>
             </a:pPr>
             <a:r>
-              <a:rPr sz="2800" b="0" i="0">
-                <a:solidFill>
-                  <a:srgbClr val="10141A"/>
-                </a:solidFill>
-                <a:latin typeface="Arial"/>
-              </a:rPr>
-              <a:t>A </a:t>
-            </a:r>
-            <a:r>
-              <a:rPr sz="2800" b="1" i="0">
-                <a:solidFill>
-                  <a:srgbClr val="10141A"/>
-                </a:solidFill>
-                <a:latin typeface="Arial"/>
-              </a:rPr>
-              <a:t>QALY</a:t>
-            </a:r>
-            <a:r>
-              <a:rPr sz="2800" b="0" i="0">
-                <a:solidFill>
-                  <a:srgbClr val="10141A"/>
-                </a:solidFill>
-                <a:latin typeface="Arial"/>
-              </a:rPr>
-              <a:t> is quality times time: an area, not a score. India has its own value set</a:t>
-            </a:r>
-          </a:p>
-        </p:txBody>
-      </p:sp>
-      <p:sp>
-        <p:nvSpPr>
-          <p:cNvPr id="5" name="TextBox 4"/>
+              <a:rPr sz="2200" b="0" i="0">
+                <a:solidFill>
+                  <a:srgbClr val="47525F"/>
+                </a:solidFill>
+                <a:latin typeface="Arial"/>
+              </a:rPr>
+              <a:t>One year of adjuvant trastuzumab against chemotherapy alone. Same model, same costs, same country. Only the source of the effectiveness estimate differs.</a:t>
+            </a:r>
+          </a:p>
+        </p:txBody>
+      </p:sp>
+      <p:graphicFrame>
+        <p:nvGraphicFramePr>
+          <p:cNvPr id="5" name="Table 4"/>
+          <p:cNvGraphicFramePr>
+            <a:graphicFrameLocks noGrp="1"/>
+          </p:cNvGraphicFramePr>
+          <p:nvPr/>
+        </p:nvGraphicFramePr>
+        <p:xfrm>
+          <a:off x="552450" y="2083296"/>
+          <a:ext cx="11087101" cy="1581001"/>
+        </p:xfrm>
+        <a:graphic>
+          <a:graphicData uri="http://schemas.openxmlformats.org/drawingml/2006/table">
+            <a:tbl>
+              <a:tblPr firstRow="1">
+                <a:tableStyleId>{5C22544A-7EE6-4342-B048-85BDC9FD1C3A}</a:tableStyleId>
+              </a:tblPr>
+              <a:tblGrid>
+                <a:gridCol w="6079927"/>
+                <a:gridCol w="1995190"/>
+                <a:gridCol w="3011984"/>
+              </a:tblGrid>
+              <a:tr h="527000">
+                <a:tc>
+                  <a:txBody>
+                    <a:bodyPr wrap="square"/>
+                    <a:lstStyle/>
+                    <a:p>
+                      <a:pPr algn="l">
+                        <a:lnSpc>
+                          <a:spcPct val="104000"/>
+                        </a:lnSpc>
+                      </a:pPr>
+                      <a:r>
+                        <a:rPr sz="2100" b="1" i="0">
+                          <a:solidFill>
+                            <a:srgbClr val="FFFFFF"/>
+                          </a:solidFill>
+                          <a:latin typeface="Arial"/>
+                        </a:rPr>
+                        <a:t>Effectiveness estimate from</a:t>
+                      </a:r>
+                    </a:p>
+                  </a:txBody>
+                  <a:tcPr marL="60000" marR="60000" marT="35000" marB="35000" anchor="t">
+                    <a:solidFill>
+                      <a:srgbClr val="162A6C"/>
+                    </a:solidFill>
+                  </a:tcPr>
+                </a:tc>
+                <a:tc>
+                  <a:txBody>
+                    <a:bodyPr wrap="square"/>
+                    <a:lstStyle/>
+                    <a:p>
+                      <a:pPr algn="l">
+                        <a:lnSpc>
+                          <a:spcPct val="104000"/>
+                        </a:lnSpc>
+                      </a:pPr>
+                      <a:r>
+                        <a:rPr sz="2100" b="1" i="0">
+                          <a:solidFill>
+                            <a:srgbClr val="FFFFFF"/>
+                          </a:solidFill>
+                          <a:latin typeface="Arial"/>
+                        </a:rPr>
+                        <a:t>QALYs gained</a:t>
+                      </a:r>
+                    </a:p>
+                  </a:txBody>
+                  <a:tcPr marL="60000" marR="60000" marT="35000" marB="35000" anchor="t">
+                    <a:solidFill>
+                      <a:srgbClr val="162A6C"/>
+                    </a:solidFill>
+                  </a:tcPr>
+                </a:tc>
+                <a:tc>
+                  <a:txBody>
+                    <a:bodyPr wrap="square"/>
+                    <a:lstStyle/>
+                    <a:p>
+                      <a:pPr algn="l">
+                        <a:lnSpc>
+                          <a:spcPct val="104000"/>
+                        </a:lnSpc>
+                      </a:pPr>
+                      <a:r>
+                        <a:rPr sz="2100" b="1" i="0">
+                          <a:solidFill>
+                            <a:srgbClr val="FFFFFF"/>
+                          </a:solidFill>
+                          <a:latin typeface="Arial"/>
+                        </a:rPr>
+                        <a:t>ICER per QALY gained</a:t>
+                      </a:r>
+                    </a:p>
+                  </a:txBody>
+                  <a:tcPr marL="60000" marR="60000" marT="35000" marB="35000" anchor="t">
+                    <a:solidFill>
+                      <a:srgbClr val="162A6C"/>
+                    </a:solidFill>
+                  </a:tcPr>
+                </a:tc>
+              </a:tr>
+              <a:tr h="527000">
+                <a:tc>
+                  <a:txBody>
+                    <a:bodyPr wrap="square"/>
+                    <a:lstStyle/>
+                    <a:p>
+                      <a:pPr algn="l">
+                        <a:lnSpc>
+                          <a:spcPct val="104000"/>
+                        </a:lnSpc>
+                      </a:pPr>
+                      <a:r>
+                        <a:rPr sz="2100" b="0" i="0">
+                          <a:solidFill>
+                            <a:srgbClr val="10141A"/>
+                          </a:solidFill>
+                          <a:latin typeface="Arial"/>
+                        </a:rPr>
+                        <a:t>The HERA trial</a:t>
+                      </a:r>
+                    </a:p>
+                  </a:txBody>
+                  <a:tcPr marL="60000" marR="60000" marT="35000" marB="35000" anchor="t">
+                    <a:solidFill>
+                      <a:srgbClr val="F4F6F9"/>
+                    </a:solidFill>
+                  </a:tcPr>
+                </a:tc>
+                <a:tc>
+                  <a:txBody>
+                    <a:bodyPr wrap="square"/>
+                    <a:lstStyle/>
+                    <a:p>
+                      <a:pPr algn="r">
+                        <a:lnSpc>
+                          <a:spcPct val="104000"/>
+                        </a:lnSpc>
+                      </a:pPr>
+                      <a:r>
+                        <a:rPr sz="2100" b="0" i="0">
+                          <a:solidFill>
+                            <a:srgbClr val="10141A"/>
+                          </a:solidFill>
+                          <a:latin typeface="Arial"/>
+                        </a:rPr>
+                        <a:t>1.29</a:t>
+                      </a:r>
+                    </a:p>
+                  </a:txBody>
+                  <a:tcPr marL="60000" marR="60000" marT="35000" marB="35000" anchor="t">
+                    <a:solidFill>
+                      <a:srgbClr val="F4F6F9"/>
+                    </a:solidFill>
+                  </a:tcPr>
+                </a:tc>
+                <a:tc>
+                  <a:txBody>
+                    <a:bodyPr wrap="square"/>
+                    <a:lstStyle/>
+                    <a:p>
+                      <a:pPr algn="r">
+                        <a:lnSpc>
+                          <a:spcPct val="104000"/>
+                        </a:lnSpc>
+                      </a:pPr>
+                      <a:r>
+                        <a:rPr sz="2100" b="0" i="0">
+                          <a:solidFill>
+                            <a:srgbClr val="10141A"/>
+                          </a:solidFill>
+                          <a:latin typeface="Arial"/>
+                        </a:rPr>
+                        <a:t>₹1,78,877</a:t>
+                      </a:r>
+                    </a:p>
+                  </a:txBody>
+                  <a:tcPr marL="60000" marR="60000" marT="35000" marB="35000" anchor="t">
+                    <a:solidFill>
+                      <a:srgbClr val="F4F6F9"/>
+                    </a:solidFill>
+                  </a:tcPr>
+                </a:tc>
+              </a:tr>
+              <a:tr h="527001">
+                <a:tc>
+                  <a:txBody>
+                    <a:bodyPr wrap="square"/>
+                    <a:lstStyle/>
+                    <a:p>
+                      <a:pPr algn="l">
+                        <a:lnSpc>
+                          <a:spcPct val="104000"/>
+                        </a:lnSpc>
+                      </a:pPr>
+                      <a:r>
+                        <a:rPr sz="2100" b="0" i="0">
+                          <a:solidFill>
+                            <a:srgbClr val="10141A"/>
+                          </a:solidFill>
+                          <a:latin typeface="Arial"/>
+                        </a:rPr>
+                        <a:t>Joint NSABP B-31 and NCCTG N9831 analysis</a:t>
+                      </a:r>
+                    </a:p>
+                  </a:txBody>
+                  <a:tcPr marL="60000" marR="60000" marT="35000" marB="35000" anchor="t">
+                    <a:noFill/>
+                  </a:tcPr>
+                </a:tc>
+                <a:tc>
+                  <a:txBody>
+                    <a:bodyPr wrap="square"/>
+                    <a:lstStyle/>
+                    <a:p>
+                      <a:pPr algn="r">
+                        <a:lnSpc>
+                          <a:spcPct val="104000"/>
+                        </a:lnSpc>
+                      </a:pPr>
+                      <a:r>
+                        <a:rPr sz="2100" b="0" i="0">
+                          <a:solidFill>
+                            <a:srgbClr val="10141A"/>
+                          </a:solidFill>
+                          <a:latin typeface="Arial"/>
+                        </a:rPr>
+                        <a:t>1.69</a:t>
+                      </a:r>
+                    </a:p>
+                  </a:txBody>
+                  <a:tcPr marL="60000" marR="60000" marT="35000" marB="35000" anchor="t">
+                    <a:noFill/>
+                  </a:tcPr>
+                </a:tc>
+                <a:tc>
+                  <a:txBody>
+                    <a:bodyPr wrap="square"/>
+                    <a:lstStyle/>
+                    <a:p>
+                      <a:pPr algn="r">
+                        <a:lnSpc>
+                          <a:spcPct val="104000"/>
+                        </a:lnSpc>
+                      </a:pPr>
+                      <a:r>
+                        <a:rPr sz="2100" b="0" i="0">
+                          <a:solidFill>
+                            <a:srgbClr val="10141A"/>
+                          </a:solidFill>
+                          <a:latin typeface="Arial"/>
+                        </a:rPr>
+                        <a:t>₹1,34,413</a:t>
+                      </a:r>
+                    </a:p>
+                  </a:txBody>
+                  <a:tcPr marL="60000" marR="60000" marT="35000" marB="35000" anchor="t">
+                    <a:noFill/>
+                  </a:tcPr>
+                </a:tc>
+              </a:tr>
+            </a:tbl>
+          </a:graphicData>
+        </a:graphic>
+      </p:graphicFrame>
+      <p:sp>
+        <p:nvSpPr>
+          <p:cNvPr id="6" name="Rectangle 5"/>
+          <p:cNvSpPr/>
+          <p:nvPr/>
+        </p:nvSpPr>
+        <p:spPr>
+          <a:xfrm>
+            <a:off x="552450" y="3786336"/>
+            <a:ext cx="11087100" cy="1032867"/>
+          </a:xfrm>
+          <a:prstGeom prst="rect">
+            <a:avLst/>
+          </a:prstGeom>
+          <a:noFill/>
+          <a:ln>
+            <a:noFill/>
+          </a:ln>
+          <a:effectLst/>
+        </p:spPr>
+        <p:style>
+          <a:lnRef idx="1">
+            <a:schemeClr val="accent1"/>
+          </a:lnRef>
+          <a:fillRef idx="3">
+            <a:schemeClr val="accent1"/>
+          </a:fillRef>
+          <a:effectRef idx="2">
+            <a:schemeClr val="accent1"/>
+          </a:effectRef>
+          <a:fontRef idx="minor">
+            <a:schemeClr val="lt1"/>
+          </a:fontRef>
+        </p:style>
+        <p:txBody>
+          <a:bodyPr rtlCol="0" anchor="ctr"/>
+          <a:lstStyle/>
+          <a:p>
+            <a:pPr algn="ctr"/>
+          </a:p>
+        </p:txBody>
+      </p:sp>
+      <p:sp>
+        <p:nvSpPr>
+          <p:cNvPr id="7" name="Rectangle 6"/>
+          <p:cNvSpPr/>
+          <p:nvPr/>
+        </p:nvSpPr>
+        <p:spPr>
+          <a:xfrm>
+            <a:off x="552450" y="3786336"/>
+            <a:ext cx="57150" cy="1032867"/>
+          </a:xfrm>
+          <a:prstGeom prst="rect">
+            <a:avLst/>
+          </a:prstGeom>
+          <a:solidFill>
+            <a:srgbClr val="8A5A00"/>
+          </a:solidFill>
+          <a:ln>
+            <a:noFill/>
+          </a:ln>
+          <a:effectLst/>
+        </p:spPr>
+        <p:style>
+          <a:lnRef idx="1">
+            <a:schemeClr val="accent1"/>
+          </a:lnRef>
+          <a:fillRef idx="3">
+            <a:schemeClr val="accent1"/>
+          </a:fillRef>
+          <a:effectRef idx="2">
+            <a:schemeClr val="accent1"/>
+          </a:effectRef>
+          <a:fontRef idx="minor">
+            <a:schemeClr val="lt1"/>
+          </a:fontRef>
+        </p:style>
+        <p:txBody>
+          <a:bodyPr rtlCol="0" anchor="ctr"/>
+          <a:lstStyle/>
+          <a:p>
+            <a:pPr algn="ctr"/>
+          </a:p>
+        </p:txBody>
+      </p:sp>
+      <p:sp>
+        <p:nvSpPr>
+          <p:cNvPr id="8" name="TextBox 7"/>
           <p:cNvSpPr txBox="1"/>
           <p:nvPr/>
         </p:nvSpPr>
         <p:spPr>
           <a:xfrm>
-            <a:off x="1288703" y="2243080"/>
-            <a:ext cx="10350847" cy="479524"/>
+            <a:off x="776189" y="3786676"/>
+            <a:ext cx="10863361" cy="1012527"/>
           </a:xfrm>
           <a:prstGeom prst="rect">
             <a:avLst/>
@@ -15099,7 +15514,7 @@
           <a:p>
             <a:pPr algn="l">
               <a:lnSpc>
-                <a:spcPct val="112500"/>
+                <a:spcPct val="101700"/>
               </a:lnSpc>
               <a:spcAft>
                 <a:spcPts val="0"/>
@@ -15107,45 +15522,27 @@
               <a:buNone/>
             </a:pPr>
             <a:r>
-              <a:rPr sz="2800" b="0" i="0">
+              <a:rPr sz="3200" b="1" i="0" spc="-32">
                 <a:solidFill>
                   <a:srgbClr val="10141A"/>
                 </a:solidFill>
                 <a:latin typeface="Arial"/>
               </a:rPr>
-              <a:t>Utilities come from the </a:t>
-            </a:r>
-            <a:r>
-              <a:rPr sz="2800" b="1" i="0">
-                <a:solidFill>
-                  <a:srgbClr val="10141A"/>
-                </a:solidFill>
-                <a:latin typeface="Arial"/>
-              </a:rPr>
-              <a:t>general public</a:t>
-            </a:r>
-            <a:r>
-              <a:rPr sz="2800" b="0" i="0">
-                <a:solidFill>
-                  <a:srgbClr val="10141A"/>
-                </a:solidFill>
-                <a:latin typeface="Arial"/>
-              </a:rPr>
-              <a:t>, and that is deliberate</a:t>
-            </a:r>
-          </a:p>
-        </p:txBody>
-      </p:sp>
-      <p:sp>
-        <p:nvSpPr>
-          <p:cNvPr id="6" name="TextBox 5"/>
+              <a:t>Nothing in the numerator moved. A bigger denominator made the ICER a third smaller.</a:t>
+            </a:r>
+          </a:p>
+        </p:txBody>
+      </p:sp>
+      <p:sp>
+        <p:nvSpPr>
+          <p:cNvPr id="9" name="TextBox 8"/>
           <p:cNvSpPr txBox="1"/>
           <p:nvPr/>
         </p:nvSpPr>
         <p:spPr>
           <a:xfrm>
-            <a:off x="1288703" y="2864587"/>
-            <a:ext cx="10350847" cy="479524"/>
+            <a:off x="552450" y="4982262"/>
+            <a:ext cx="11087100" cy="781645"/>
           </a:xfrm>
           <a:prstGeom prst="rect">
             <a:avLst/>
@@ -15160,7 +15557,7 @@
           <a:p>
             <a:pPr algn="l">
               <a:lnSpc>
-                <a:spcPct val="112500"/>
+                <a:spcPct val="116700"/>
               </a:lnSpc>
               <a:spcAft>
                 <a:spcPts val="0"/>
@@ -15168,27 +15565,71 @@
               <a:buNone/>
             </a:pPr>
             <a:r>
-              <a:rPr sz="2800" b="0" i="0">
-                <a:solidFill>
-                  <a:srgbClr val="10141A"/>
-                </a:solidFill>
-                <a:latin typeface="Arial"/>
-              </a:rPr>
-              <a:t>QALYs and DALYs cannot share a league table</a:t>
-            </a:r>
-          </a:p>
-        </p:txBody>
-      </p:sp>
-      <p:sp>
-        <p:nvSpPr>
-          <p:cNvPr id="7" name="TextBox 6"/>
+              <a:rPr sz="2200" b="0" i="0">
+                <a:solidFill>
+                  <a:srgbClr val="47525F"/>
+                </a:solidFill>
+                <a:latin typeface="Arial"/>
+              </a:rPr>
+              <a:t>Which is why the incremental ratio is a claim about two numbers, not one. Session 8 returns to this table and puts a probability on each row.</a:t>
+            </a:r>
+          </a:p>
+        </p:txBody>
+      </p:sp>
+      <p:sp>
+        <p:nvSpPr>
+          <p:cNvPr id="10" name="Rectangle 9"/>
+          <p:cNvSpPr/>
+          <p:nvPr/>
+        </p:nvSpPr>
+        <p:spPr>
+          <a:xfrm>
+            <a:off x="552450" y="5923508"/>
+            <a:ext cx="11087100" cy="9525"/>
+          </a:xfrm>
+          <a:prstGeom prst="rect">
+            <a:avLst/>
+          </a:prstGeom>
+          <a:solidFill>
+            <a:srgbClr val="CCD4DD"/>
+          </a:solidFill>
+          <a:ln>
+            <a:noFill/>
+          </a:ln>
+          <a:effectLst/>
+        </p:spPr>
+        <p:style>
+          <a:lnRef idx="1">
+            <a:schemeClr val="accent1"/>
+          </a:lnRef>
+          <a:fillRef idx="3">
+            <a:schemeClr val="accent1"/>
+          </a:fillRef>
+          <a:effectRef idx="2">
+            <a:schemeClr val="accent1"/>
+          </a:effectRef>
+          <a:fontRef idx="minor">
+            <a:schemeClr val="lt1"/>
+          </a:fontRef>
+        </p:style>
+        <p:txBody>
+          <a:bodyPr rtlCol="0" anchor="ctr"/>
+          <a:lstStyle/>
+          <a:p>
+            <a:pPr algn="ctr"/>
+          </a:p>
+        </p:txBody>
+      </p:sp>
+      <p:sp>
+        <p:nvSpPr>
+          <p:cNvPr id="11" name="TextBox 10"/>
           <p:cNvSpPr txBox="1"/>
           <p:nvPr/>
         </p:nvSpPr>
         <p:spPr>
           <a:xfrm>
-            <a:off x="1288703" y="3486093"/>
-            <a:ext cx="10350847" cy="479524"/>
+            <a:off x="552450" y="5992329"/>
+            <a:ext cx="11087100" cy="258098"/>
           </a:xfrm>
           <a:prstGeom prst="rect">
             <a:avLst/>
@@ -15203,7 +15644,7 @@
           <a:p>
             <a:pPr algn="l">
               <a:lnSpc>
-                <a:spcPct val="112500"/>
+                <a:spcPct val="116700"/>
               </a:lnSpc>
               <a:spcAft>
                 <a:spcPts val="0"/>
@@ -15211,135 +15652,31 @@
               <a:buNone/>
             </a:pPr>
             <a:r>
-              <a:rPr sz="2800" b="0" i="0">
-                <a:solidFill>
-                  <a:srgbClr val="10141A"/>
-                </a:solidFill>
-                <a:latin typeface="Arial"/>
-              </a:rPr>
-              <a:t>Discount both at </a:t>
-            </a:r>
-            <a:r>
-              <a:rPr sz="2800" b="1" i="0">
-                <a:solidFill>
-                  <a:srgbClr val="10141A"/>
-                </a:solidFill>
-                <a:latin typeface="Arial"/>
-              </a:rPr>
-              <a:t>3%</a:t>
-            </a:r>
-            <a:r>
-              <a:rPr sz="2800" b="0" i="0">
-                <a:solidFill>
-                  <a:srgbClr val="10141A"/>
-                </a:solidFill>
-                <a:latin typeface="Arial"/>
-              </a:rPr>
-              <a:t>, test 0 to 5%, report undiscounted too</a:t>
-            </a:r>
-          </a:p>
-        </p:txBody>
-      </p:sp>
-      <p:sp>
-        <p:nvSpPr>
-          <p:cNvPr id="8" name="TextBox 7"/>
-          <p:cNvSpPr txBox="1"/>
-          <p:nvPr/>
-        </p:nvSpPr>
-        <p:spPr>
-          <a:xfrm>
-            <a:off x="1288703" y="4107599"/>
-            <a:ext cx="10350847" cy="959048"/>
-          </a:xfrm>
-          <a:prstGeom prst="rect">
-            <a:avLst/>
-          </a:prstGeom>
-          <a:noFill/>
-        </p:spPr>
-        <p:txBody>
-          <a:bodyPr wrap="square" lIns="0" rIns="0" tIns="0" bIns="0">
-            <a:spAutoFit/>
-          </a:bodyPr>
-          <a:lstStyle/>
-          <a:p>
-            <a:pPr algn="l">
-              <a:lnSpc>
-                <a:spcPct val="112500"/>
-              </a:lnSpc>
-              <a:spcAft>
-                <a:spcPts val="0"/>
-              </a:spcAft>
-              <a:buNone/>
-            </a:pPr>
-            <a:r>
-              <a:rPr sz="2800" b="1" i="0">
-                <a:solidFill>
-                  <a:srgbClr val="10141A"/>
-                </a:solidFill>
-                <a:latin typeface="Arial"/>
-              </a:rPr>
-              <a:t>Average ratios are meaningless.</a:t>
-            </a:r>
-            <a:r>
-              <a:rPr sz="2800" b="0" i="0">
-                <a:solidFill>
-                  <a:srgbClr val="10141A"/>
-                </a:solidFill>
-                <a:latin typeface="Arial"/>
-              </a:rPr>
-              <a:t> Only incremental ones answer a decision</a:t>
-            </a:r>
-          </a:p>
-        </p:txBody>
-      </p:sp>
-      <p:sp>
-        <p:nvSpPr>
-          <p:cNvPr id="9" name="TextBox 8"/>
-          <p:cNvSpPr txBox="1"/>
-          <p:nvPr/>
-        </p:nvSpPr>
-        <p:spPr>
-          <a:xfrm>
-            <a:off x="1288703" y="5208630"/>
-            <a:ext cx="10350847" cy="479524"/>
-          </a:xfrm>
-          <a:prstGeom prst="rect">
-            <a:avLst/>
-          </a:prstGeom>
-          <a:noFill/>
-        </p:spPr>
-        <p:txBody>
-          <a:bodyPr wrap="square" lIns="0" rIns="0" tIns="0" bIns="0">
-            <a:spAutoFit/>
-          </a:bodyPr>
-          <a:lstStyle/>
-          <a:p>
-            <a:pPr algn="l">
-              <a:lnSpc>
-                <a:spcPct val="112500"/>
-              </a:lnSpc>
-              <a:spcAft>
-                <a:spcPts val="0"/>
-              </a:spcAft>
-              <a:buNone/>
-            </a:pPr>
-            <a:r>
-              <a:rPr sz="2800" b="0" i="0">
-                <a:solidFill>
-                  <a:srgbClr val="10141A"/>
-                </a:solidFill>
-                <a:latin typeface="Arial"/>
-              </a:rPr>
-              <a:t>Rank by cost, remove dominance, then look for a </a:t>
-            </a:r>
-            <a:r>
-              <a:rPr sz="2800" b="1" i="0">
-                <a:solidFill>
-                  <a:srgbClr val="10141A"/>
-                </a:solidFill>
-                <a:latin typeface="Arial"/>
-              </a:rPr>
-              <a:t>falling ICER</a:t>
+              <a:rPr sz="1400" b="0" i="0">
+                <a:solidFill>
+                  <a:srgbClr val="75808D"/>
+                </a:solidFill>
+                <a:latin typeface="Arial"/>
+              </a:rPr>
+              <a:t>Gupta, Verma, Gupta, Prinja, </a:t>
+            </a:r>
+            <a:r>
+              <a:rPr sz="1400" b="0" i="1">
+                <a:solidFill>
+                  <a:srgbClr val="75808D"/>
+                </a:solidFill>
+                <a:latin typeface="Arial"/>
+              </a:rPr>
+              <a:t>JCO Global Oncology</a:t>
+            </a:r>
+            <a:r>
+              <a:rPr sz="1400" b="0" i="0">
+                <a:solidFill>
+                  <a:srgbClr val="75808D"/>
+                </a:solidFill>
+                <a:latin typeface="Arial"/>
+              </a:rPr>
+              <a:t>, 2020.</a:t>
             </a:r>
           </a:p>
         </p:txBody>
@@ -15444,7 +15781,7 @@
                 </a:solidFill>
                 <a:latin typeface="Arial"/>
               </a:rPr>
-              <a:t>Sources</a:t>
+              <a:t>Recap</a:t>
             </a:r>
           </a:p>
         </p:txBody>
@@ -15457,8 +15794,8 @@
         </p:nvSpPr>
         <p:spPr>
           <a:xfrm>
-            <a:off x="1111002" y="1142050"/>
-            <a:ext cx="5068937" cy="2814786"/>
+            <a:off x="1288703" y="1142050"/>
+            <a:ext cx="10350847" cy="959048"/>
           </a:xfrm>
           <a:prstGeom prst="rect">
             <a:avLst/>
@@ -15471,144 +15808,41 @@
           </a:bodyPr>
           <a:lstStyle/>
           <a:p>
-            <a:pPr algn="l" marL="285750" indent="-285750">
+            <a:pPr algn="l">
               <a:lnSpc>
-                <a:spcPct val="120800"/>
+                <a:spcPct val="112500"/>
               </a:lnSpc>
               <a:spcAft>
-                <a:spcPts val="400"/>
+                <a:spcPts val="0"/>
               </a:spcAft>
-              <a:buAutoNum type="arabicPeriod"/>
+              <a:buNone/>
             </a:pPr>
             <a:r>
-              <a:rPr sz="1400" b="1" i="0">
+              <a:rPr sz="2800" b="0" i="0">
                 <a:solidFill>
                   <a:srgbClr val="10141A"/>
                 </a:solidFill>
                 <a:latin typeface="Arial"/>
               </a:rPr>
-              <a:t>Drummond MF, Sculpher MJ, Claxton K, Stoddart GL, Torrance GW.</a:t>
-            </a:r>
-            <a:r>
-              <a:rPr sz="1400" b="0" i="0">
-                <a:solidFill>
-                  <a:srgbClr val="47525F"/>
-                </a:solidFill>
-                <a:latin typeface="Arial"/>
-              </a:rPr>
-              <a:t> Methods for the Economic Evaluation of Health Care Programmes. 4th ed. Oxford University Press; 2015. </a:t>
-            </a:r>
-            <a:r>
-              <a:rPr sz="1400" b="1" i="0">
+              <a:t>A </a:t>
+            </a:r>
+            <a:r>
+              <a:rPr sz="2800" b="1" i="0">
                 <a:solidFill>
                   <a:srgbClr val="10141A"/>
                 </a:solidFill>
                 <a:latin typeface="Arial"/>
               </a:rPr>
-              <a:t>Chapter 4</a:t>
-            </a:r>
-            <a:r>
-              <a:rPr sz="1400" b="0" i="0">
-                <a:solidFill>
-                  <a:srgbClr val="47525F"/>
-                </a:solidFill>
-                <a:latin typeface="Arial"/>
-              </a:rPr>
-              <a:t>, pp. 77–123.</a:t>
-            </a:r>
-          </a:p>
-          <a:p>
-            <a:pPr algn="l" marL="285750" indent="-285750">
-              <a:lnSpc>
-                <a:spcPct val="120800"/>
-              </a:lnSpc>
-              <a:spcAft>
-                <a:spcPts val="400"/>
-              </a:spcAft>
-              <a:buAutoNum type="arabicPeriod" startAt="2"/>
-            </a:pPr>
-            <a:r>
-              <a:rPr sz="1400" b="1" i="0">
+              <a:t>QALY</a:t>
+            </a:r>
+            <a:r>
+              <a:rPr sz="2800" b="0" i="0">
                 <a:solidFill>
                   <a:srgbClr val="10141A"/>
                 </a:solidFill>
                 <a:latin typeface="Arial"/>
               </a:rPr>
-              <a:t>Sharma D, Prinja S, Aggarwal AK, Rajsekar K, Bahuguna P.</a:t>
-            </a:r>
-            <a:r>
-              <a:rPr sz="1400" b="0" i="0">
-                <a:solidFill>
-                  <a:srgbClr val="47525F"/>
-                </a:solidFill>
-                <a:latin typeface="Arial"/>
-              </a:rPr>
-              <a:t> Development of the Indian Reference Case for undertaking economic evaluation for health technology assessment. </a:t>
-            </a:r>
-            <a:r>
-              <a:rPr sz="1400" b="0" i="1">
-                <a:solidFill>
-                  <a:srgbClr val="47525F"/>
-                </a:solidFill>
-                <a:latin typeface="Arial"/>
-              </a:rPr>
-              <a:t>Lancet Reg Health Southeast Asia</a:t>
-            </a:r>
-            <a:r>
-              <a:rPr sz="1400" b="0" i="0">
-                <a:solidFill>
-                  <a:srgbClr val="47525F"/>
-                </a:solidFill>
-                <a:latin typeface="Arial"/>
-              </a:rPr>
-              <a:t> 2023;16:100241. PMID 37694178</a:t>
-            </a:r>
-          </a:p>
-          <a:p>
-            <a:pPr algn="l" marL="285750" indent="-285750">
-              <a:lnSpc>
-                <a:spcPct val="120800"/>
-              </a:lnSpc>
-              <a:spcAft>
-                <a:spcPts val="400"/>
-              </a:spcAft>
-              <a:buAutoNum type="arabicPeriod" startAt="3"/>
-            </a:pPr>
-            <a:r>
-              <a:rPr sz="1400" b="1" i="0">
-                <a:solidFill>
-                  <a:srgbClr val="10141A"/>
-                </a:solidFill>
-                <a:latin typeface="Arial"/>
-              </a:rPr>
-              <a:t>Jyani G, Sharma A, Prinja S, Kar SS, et al.</a:t>
-            </a:r>
-            <a:r>
-              <a:rPr sz="1400" b="0" i="0">
-                <a:solidFill>
-                  <a:srgbClr val="47525F"/>
-                </a:solidFill>
-                <a:latin typeface="Arial"/>
-              </a:rPr>
-              <a:t> Development of an EQ-5D value set for India using an extended design (DEVINE) study. </a:t>
-            </a:r>
-            <a:r>
-              <a:rPr sz="1400" b="0" i="1">
-                <a:solidFill>
-                  <a:srgbClr val="47525F"/>
-                </a:solidFill>
-                <a:latin typeface="Arial"/>
-              </a:rPr>
-              <a:t>Value Health</a:t>
-            </a:r>
-            <a:r>
-              <a:rPr sz="1400" b="0" i="0">
-                <a:solidFill>
-                  <a:srgbClr val="47525F"/>
-                </a:solidFill>
-                <a:latin typeface="Arial"/>
-              </a:rPr>
-              <a:t> 2022;25(7):1218–26. PMID 35779943</a:t>
+              <a:t> is quality times time: an area, not a score. India has its own value set</a:t>
             </a:r>
           </a:p>
         </p:txBody>
@@ -15621,8 +15855,8 @@
         </p:nvSpPr>
         <p:spPr>
           <a:xfrm>
-            <a:off x="6570613" y="1142050"/>
-            <a:ext cx="5068937" cy="2814786"/>
+            <a:off x="1288703" y="2243080"/>
+            <a:ext cx="10350847" cy="479524"/>
           </a:xfrm>
           <a:prstGeom prst="rect">
             <a:avLst/>
@@ -15635,135 +15869,249 @@
           </a:bodyPr>
           <a:lstStyle/>
           <a:p>
-            <a:pPr algn="l" marL="285750" indent="-285750">
+            <a:pPr algn="l">
               <a:lnSpc>
-                <a:spcPct val="120800"/>
+                <a:spcPct val="112500"/>
               </a:lnSpc>
               <a:spcAft>
-                <a:spcPts val="400"/>
+                <a:spcPts val="0"/>
               </a:spcAft>
-              <a:buAutoNum type="arabicPeriod" startAt="4"/>
+              <a:buNone/>
             </a:pPr>
             <a:r>
-              <a:rPr sz="1400" b="1" i="0">
+              <a:rPr sz="2800" b="0" i="0">
                 <a:solidFill>
                   <a:srgbClr val="10141A"/>
                 </a:solidFill>
                 <a:latin typeface="Arial"/>
               </a:rPr>
-              <a:t>Chugh Y, Jyani G, Kar SS, Rajsekar K, Prinja S, et al.</a:t>
-            </a:r>
-            <a:r>
-              <a:rPr sz="1400" b="0" i="0">
-                <a:solidFill>
-                  <a:srgbClr val="47525F"/>
-                </a:solidFill>
-                <a:latin typeface="Arial"/>
-              </a:rPr>
-              <a:t> Estimating the willingness-to-pay per quality-adjusted life-year to aid health technology assessment in India. </a:t>
-            </a:r>
-            <a:r>
-              <a:rPr sz="1400" b="0" i="1">
-                <a:solidFill>
-                  <a:srgbClr val="47525F"/>
-                </a:solidFill>
-                <a:latin typeface="Arial"/>
-              </a:rPr>
-              <a:t>Value Health</a:t>
-            </a:r>
-            <a:r>
-              <a:rPr sz="1400" b="0" i="0">
-                <a:solidFill>
-                  <a:srgbClr val="47525F"/>
-                </a:solidFill>
-                <a:latin typeface="Arial"/>
-              </a:rPr>
-              <a:t> 2026;29(3):457–66. PMID 41176029</a:t>
-            </a:r>
-          </a:p>
-          <a:p>
-            <a:pPr algn="l" marL="285750" indent="-285750">
+              <a:t>Utilities come from the </a:t>
+            </a:r>
+            <a:r>
+              <a:rPr sz="2800" b="1" i="0">
+                <a:solidFill>
+                  <a:srgbClr val="10141A"/>
+                </a:solidFill>
+                <a:latin typeface="Arial"/>
+              </a:rPr>
+              <a:t>general public</a:t>
+            </a:r>
+            <a:r>
+              <a:rPr sz="2800" b="0" i="0">
+                <a:solidFill>
+                  <a:srgbClr val="10141A"/>
+                </a:solidFill>
+                <a:latin typeface="Arial"/>
+              </a:rPr>
+              <a:t>, and that is deliberate</a:t>
+            </a:r>
+          </a:p>
+        </p:txBody>
+      </p:sp>
+      <p:sp>
+        <p:nvSpPr>
+          <p:cNvPr id="6" name="TextBox 5"/>
+          <p:cNvSpPr txBox="1"/>
+          <p:nvPr/>
+        </p:nvSpPr>
+        <p:spPr>
+          <a:xfrm>
+            <a:off x="1288703" y="2864587"/>
+            <a:ext cx="10350847" cy="479524"/>
+          </a:xfrm>
+          <a:prstGeom prst="rect">
+            <a:avLst/>
+          </a:prstGeom>
+          <a:noFill/>
+        </p:spPr>
+        <p:txBody>
+          <a:bodyPr wrap="square" lIns="0" rIns="0" tIns="0" bIns="0">
+            <a:spAutoFit/>
+          </a:bodyPr>
+          <a:lstStyle/>
+          <a:p>
+            <a:pPr algn="l">
               <a:lnSpc>
-                <a:spcPct val="120800"/>
+                <a:spcPct val="112500"/>
               </a:lnSpc>
               <a:spcAft>
-                <a:spcPts val="400"/>
+                <a:spcPts val="0"/>
               </a:spcAft>
-              <a:buAutoNum type="arabicPeriod" startAt="5"/>
+              <a:buNone/>
             </a:pPr>
             <a:r>
-              <a:rPr sz="1400" b="1" i="0">
+              <a:rPr sz="2800" b="0" i="0">
                 <a:solidFill>
                   <a:srgbClr val="10141A"/>
                 </a:solidFill>
                 <a:latin typeface="Arial"/>
               </a:rPr>
-              <a:t>Chauhan AS, Prinja S, Srinivasan R, et al.</a:t>
-            </a:r>
-            <a:r>
-              <a:rPr sz="1400" b="0" i="0">
-                <a:solidFill>
-                  <a:srgbClr val="47525F"/>
-                </a:solidFill>
-                <a:latin typeface="Arial"/>
-              </a:rPr>
-              <a:t> Cost effectiveness of strategies for cervical cancer prevention in India. </a:t>
-            </a:r>
-            <a:r>
-              <a:rPr sz="1400" b="0" i="1">
-                <a:solidFill>
-                  <a:srgbClr val="47525F"/>
-                </a:solidFill>
-                <a:latin typeface="Arial"/>
-              </a:rPr>
-              <a:t>PLoS One</a:t>
-            </a:r>
-            <a:r>
-              <a:rPr sz="1400" b="0" i="0">
-                <a:solidFill>
-                  <a:srgbClr val="47525F"/>
-                </a:solidFill>
-                <a:latin typeface="Arial"/>
-              </a:rPr>
-              <a:t> 2020;15(9):e0238291. PMID 32870941</a:t>
-            </a:r>
-          </a:p>
-          <a:p>
-            <a:pPr algn="l" marL="285750" indent="-285750">
+              <a:t>QALYs and DALYs cannot share a league table</a:t>
+            </a:r>
+          </a:p>
+        </p:txBody>
+      </p:sp>
+      <p:sp>
+        <p:nvSpPr>
+          <p:cNvPr id="7" name="TextBox 6"/>
+          <p:cNvSpPr txBox="1"/>
+          <p:nvPr/>
+        </p:nvSpPr>
+        <p:spPr>
+          <a:xfrm>
+            <a:off x="1288703" y="3486093"/>
+            <a:ext cx="10350847" cy="479524"/>
+          </a:xfrm>
+          <a:prstGeom prst="rect">
+            <a:avLst/>
+          </a:prstGeom>
+          <a:noFill/>
+        </p:spPr>
+        <p:txBody>
+          <a:bodyPr wrap="square" lIns="0" rIns="0" tIns="0" bIns="0">
+            <a:spAutoFit/>
+          </a:bodyPr>
+          <a:lstStyle/>
+          <a:p>
+            <a:pPr algn="l">
               <a:lnSpc>
-                <a:spcPct val="120800"/>
+                <a:spcPct val="112500"/>
               </a:lnSpc>
               <a:spcAft>
-                <a:spcPts val="400"/>
+                <a:spcPts val="0"/>
               </a:spcAft>
-              <a:buAutoNum type="arabicPeriod" startAt="6"/>
+              <a:buNone/>
             </a:pPr>
             <a:r>
-              <a:rPr sz="1400" b="0" i="0">
-                <a:solidFill>
-                  <a:srgbClr val="47525F"/>
-                </a:solidFill>
-                <a:latin typeface="Arial"/>
-              </a:rPr>
-              <a:t>The five-strategy ranking table is </a:t>
-            </a:r>
-            <a:r>
-              <a:rPr sz="1400" b="1" i="0">
+              <a:rPr sz="2800" b="0" i="0">
                 <a:solidFill>
                   <a:srgbClr val="10141A"/>
                 </a:solidFill>
                 <a:latin typeface="Arial"/>
               </a:rPr>
-              <a:t>constructed for teaching</a:t>
-            </a:r>
-            <a:r>
-              <a:rPr sz="1400" b="0" i="0">
-                <a:solidFill>
-                  <a:srgbClr val="47525F"/>
-                </a:solidFill>
-                <a:latin typeface="Arial"/>
-              </a:rPr>
-              <a:t>, built so that simple dominance, extended dominance and a frontier all appear at once. No single published Indian paper shows all three cleanly.</a:t>
+              <a:t>Discount both at </a:t>
+            </a:r>
+            <a:r>
+              <a:rPr sz="2800" b="1" i="0">
+                <a:solidFill>
+                  <a:srgbClr val="10141A"/>
+                </a:solidFill>
+                <a:latin typeface="Arial"/>
+              </a:rPr>
+              <a:t>3%</a:t>
+            </a:r>
+            <a:r>
+              <a:rPr sz="2800" b="0" i="0">
+                <a:solidFill>
+                  <a:srgbClr val="10141A"/>
+                </a:solidFill>
+                <a:latin typeface="Arial"/>
+              </a:rPr>
+              <a:t>, test 0 to 5%, report undiscounted too</a:t>
+            </a:r>
+          </a:p>
+        </p:txBody>
+      </p:sp>
+      <p:sp>
+        <p:nvSpPr>
+          <p:cNvPr id="8" name="TextBox 7"/>
+          <p:cNvSpPr txBox="1"/>
+          <p:nvPr/>
+        </p:nvSpPr>
+        <p:spPr>
+          <a:xfrm>
+            <a:off x="1288703" y="4107599"/>
+            <a:ext cx="10350847" cy="959048"/>
+          </a:xfrm>
+          <a:prstGeom prst="rect">
+            <a:avLst/>
+          </a:prstGeom>
+          <a:noFill/>
+        </p:spPr>
+        <p:txBody>
+          <a:bodyPr wrap="square" lIns="0" rIns="0" tIns="0" bIns="0">
+            <a:spAutoFit/>
+          </a:bodyPr>
+          <a:lstStyle/>
+          <a:p>
+            <a:pPr algn="l">
+              <a:lnSpc>
+                <a:spcPct val="112500"/>
+              </a:lnSpc>
+              <a:spcAft>
+                <a:spcPts val="0"/>
+              </a:spcAft>
+              <a:buNone/>
+            </a:pPr>
+            <a:r>
+              <a:rPr sz="2800" b="1" i="0">
+                <a:solidFill>
+                  <a:srgbClr val="10141A"/>
+                </a:solidFill>
+                <a:latin typeface="Arial"/>
+              </a:rPr>
+              <a:t>Average ratios are meaningless.</a:t>
+            </a:r>
+            <a:r>
+              <a:rPr sz="2800" b="0" i="0">
+                <a:solidFill>
+                  <a:srgbClr val="10141A"/>
+                </a:solidFill>
+                <a:latin typeface="Arial"/>
+              </a:rPr>
+              <a:t> Only incremental ones answer a decision</a:t>
+            </a:r>
+          </a:p>
+        </p:txBody>
+      </p:sp>
+      <p:sp>
+        <p:nvSpPr>
+          <p:cNvPr id="9" name="TextBox 8"/>
+          <p:cNvSpPr txBox="1"/>
+          <p:nvPr/>
+        </p:nvSpPr>
+        <p:spPr>
+          <a:xfrm>
+            <a:off x="1288703" y="5208630"/>
+            <a:ext cx="10350847" cy="479524"/>
+          </a:xfrm>
+          <a:prstGeom prst="rect">
+            <a:avLst/>
+          </a:prstGeom>
+          <a:noFill/>
+        </p:spPr>
+        <p:txBody>
+          <a:bodyPr wrap="square" lIns="0" rIns="0" tIns="0" bIns="0">
+            <a:spAutoFit/>
+          </a:bodyPr>
+          <a:lstStyle/>
+          <a:p>
+            <a:pPr algn="l">
+              <a:lnSpc>
+                <a:spcPct val="112500"/>
+              </a:lnSpc>
+              <a:spcAft>
+                <a:spcPts val="0"/>
+              </a:spcAft>
+              <a:buNone/>
+            </a:pPr>
+            <a:r>
+              <a:rPr sz="2800" b="0" i="0">
+                <a:solidFill>
+                  <a:srgbClr val="10141A"/>
+                </a:solidFill>
+                <a:latin typeface="Arial"/>
+              </a:rPr>
+              <a:t>Rank by cost, remove dominance, then look for a </a:t>
+            </a:r>
+            <a:r>
+              <a:rPr sz="2800" b="1" i="0">
+                <a:solidFill>
+                  <a:srgbClr val="10141A"/>
+                </a:solidFill>
+                <a:latin typeface="Arial"/>
+              </a:rPr>
+              <a:t>falling ICER</a:t>
             </a:r>
           </a:p>
         </p:txBody>
@@ -15788,6 +16136,430 @@
       <p:grpSpPr/>
       <p:sp>
         <p:nvSpPr>
+          <p:cNvPr id="2" name="Rectangle 1"/>
+          <p:cNvSpPr/>
+          <p:nvPr/>
+        </p:nvSpPr>
+        <p:spPr>
+          <a:xfrm>
+            <a:off x="0" y="0"/>
+            <a:ext cx="12192000" cy="876300"/>
+          </a:xfrm>
+          <a:prstGeom prst="rect">
+            <a:avLst/>
+          </a:prstGeom>
+          <a:solidFill>
+            <a:srgbClr val="162A6C"/>
+          </a:solidFill>
+          <a:ln>
+            <a:noFill/>
+          </a:ln>
+          <a:effectLst/>
+        </p:spPr>
+        <p:style>
+          <a:lnRef idx="1">
+            <a:schemeClr val="accent1"/>
+          </a:lnRef>
+          <a:fillRef idx="3">
+            <a:schemeClr val="accent1"/>
+          </a:fillRef>
+          <a:effectRef idx="2">
+            <a:schemeClr val="accent1"/>
+          </a:effectRef>
+          <a:fontRef idx="minor">
+            <a:schemeClr val="lt1"/>
+          </a:fontRef>
+        </p:style>
+        <p:txBody>
+          <a:bodyPr rtlCol="0" anchor="ctr"/>
+          <a:lstStyle/>
+          <a:p>
+            <a:pPr algn="ctr"/>
+          </a:p>
+        </p:txBody>
+      </p:sp>
+      <p:sp>
+        <p:nvSpPr>
+          <p:cNvPr id="3" name="TextBox 2"/>
+          <p:cNvSpPr txBox="1"/>
+          <p:nvPr/>
+        </p:nvSpPr>
+        <p:spPr>
+          <a:xfrm>
+            <a:off x="552450" y="0"/>
+            <a:ext cx="11087100" cy="876300"/>
+          </a:xfrm>
+          <a:prstGeom prst="rect">
+            <a:avLst/>
+          </a:prstGeom>
+          <a:noFill/>
+        </p:spPr>
+        <p:txBody>
+          <a:bodyPr wrap="square" lIns="0" rIns="0" tIns="0" bIns="0" anchor="ctr">
+            <a:spAutoFit/>
+          </a:bodyPr>
+          <a:lstStyle/>
+          <a:p>
+            <a:pPr algn="l">
+              <a:lnSpc>
+                <a:spcPct val="93300"/>
+              </a:lnSpc>
+              <a:spcAft>
+                <a:spcPts val="0"/>
+              </a:spcAft>
+              <a:buNone/>
+            </a:pPr>
+            <a:r>
+              <a:rPr sz="3000" b="1" i="0" spc="-15">
+                <a:solidFill>
+                  <a:srgbClr val="FFFFFF"/>
+                </a:solidFill>
+                <a:latin typeface="Arial"/>
+              </a:rPr>
+              <a:t>Sources</a:t>
+            </a:r>
+          </a:p>
+        </p:txBody>
+      </p:sp>
+      <p:sp>
+        <p:nvSpPr>
+          <p:cNvPr id="4" name="TextBox 3"/>
+          <p:cNvSpPr txBox="1"/>
+          <p:nvPr/>
+        </p:nvSpPr>
+        <p:spPr>
+          <a:xfrm>
+            <a:off x="1111002" y="1142050"/>
+            <a:ext cx="5068937" cy="2814786"/>
+          </a:xfrm>
+          <a:prstGeom prst="rect">
+            <a:avLst/>
+          </a:prstGeom>
+          <a:noFill/>
+        </p:spPr>
+        <p:txBody>
+          <a:bodyPr wrap="square" lIns="0" rIns="0" tIns="0" bIns="0">
+            <a:spAutoFit/>
+          </a:bodyPr>
+          <a:lstStyle/>
+          <a:p>
+            <a:pPr algn="l" marL="285750" indent="-285750">
+              <a:lnSpc>
+                <a:spcPct val="120800"/>
+              </a:lnSpc>
+              <a:spcAft>
+                <a:spcPts val="400"/>
+              </a:spcAft>
+              <a:buAutoNum type="arabicPeriod"/>
+            </a:pPr>
+            <a:r>
+              <a:rPr sz="1400" b="1" i="0">
+                <a:solidFill>
+                  <a:srgbClr val="10141A"/>
+                </a:solidFill>
+                <a:latin typeface="Arial"/>
+              </a:rPr>
+              <a:t>Drummond MF, Sculpher MJ, Claxton K, Stoddart GL, Torrance GW.</a:t>
+            </a:r>
+            <a:r>
+              <a:rPr sz="1400" b="0" i="0">
+                <a:solidFill>
+                  <a:srgbClr val="47525F"/>
+                </a:solidFill>
+                <a:latin typeface="Arial"/>
+              </a:rPr>
+              <a:t> Methods for the Economic Evaluation of Health Care Programmes. 4th ed. Oxford University Press; 2015. </a:t>
+            </a:r>
+            <a:r>
+              <a:rPr sz="1400" b="1" i="0">
+                <a:solidFill>
+                  <a:srgbClr val="10141A"/>
+                </a:solidFill>
+                <a:latin typeface="Arial"/>
+              </a:rPr>
+              <a:t>Chapter 4</a:t>
+            </a:r>
+            <a:r>
+              <a:rPr sz="1400" b="0" i="0">
+                <a:solidFill>
+                  <a:srgbClr val="47525F"/>
+                </a:solidFill>
+                <a:latin typeface="Arial"/>
+              </a:rPr>
+              <a:t>, pp. 77–123.</a:t>
+            </a:r>
+          </a:p>
+          <a:p>
+            <a:pPr algn="l" marL="285750" indent="-285750">
+              <a:lnSpc>
+                <a:spcPct val="120800"/>
+              </a:lnSpc>
+              <a:spcAft>
+                <a:spcPts val="400"/>
+              </a:spcAft>
+              <a:buAutoNum type="arabicPeriod" startAt="2"/>
+            </a:pPr>
+            <a:r>
+              <a:rPr sz="1400" b="1" i="0">
+                <a:solidFill>
+                  <a:srgbClr val="10141A"/>
+                </a:solidFill>
+                <a:latin typeface="Arial"/>
+              </a:rPr>
+              <a:t>Sharma D, Prinja S, Aggarwal AK, Rajsekar K, Bahuguna P.</a:t>
+            </a:r>
+            <a:r>
+              <a:rPr sz="1400" b="0" i="0">
+                <a:solidFill>
+                  <a:srgbClr val="47525F"/>
+                </a:solidFill>
+                <a:latin typeface="Arial"/>
+              </a:rPr>
+              <a:t> Development of the Indian Reference Case for undertaking economic evaluation for health technology assessment. </a:t>
+            </a:r>
+            <a:r>
+              <a:rPr sz="1400" b="0" i="1">
+                <a:solidFill>
+                  <a:srgbClr val="47525F"/>
+                </a:solidFill>
+                <a:latin typeface="Arial"/>
+              </a:rPr>
+              <a:t>Lancet Reg Health Southeast Asia</a:t>
+            </a:r>
+            <a:r>
+              <a:rPr sz="1400" b="0" i="0">
+                <a:solidFill>
+                  <a:srgbClr val="47525F"/>
+                </a:solidFill>
+                <a:latin typeface="Arial"/>
+              </a:rPr>
+              <a:t> 2023;16:100241. PMID 37694178</a:t>
+            </a:r>
+          </a:p>
+          <a:p>
+            <a:pPr algn="l" marL="285750" indent="-285750">
+              <a:lnSpc>
+                <a:spcPct val="120800"/>
+              </a:lnSpc>
+              <a:spcAft>
+                <a:spcPts val="400"/>
+              </a:spcAft>
+              <a:buAutoNum type="arabicPeriod" startAt="3"/>
+            </a:pPr>
+            <a:r>
+              <a:rPr sz="1400" b="1" i="0">
+                <a:solidFill>
+                  <a:srgbClr val="10141A"/>
+                </a:solidFill>
+                <a:latin typeface="Arial"/>
+              </a:rPr>
+              <a:t>Jyani G, Sharma A, Prinja S, Kar SS, et al.</a:t>
+            </a:r>
+            <a:r>
+              <a:rPr sz="1400" b="0" i="0">
+                <a:solidFill>
+                  <a:srgbClr val="47525F"/>
+                </a:solidFill>
+                <a:latin typeface="Arial"/>
+              </a:rPr>
+              <a:t> Development of an EQ-5D value set for India using an extended design (DEVINE) study. </a:t>
+            </a:r>
+            <a:r>
+              <a:rPr sz="1400" b="0" i="1">
+                <a:solidFill>
+                  <a:srgbClr val="47525F"/>
+                </a:solidFill>
+                <a:latin typeface="Arial"/>
+              </a:rPr>
+              <a:t>Value Health</a:t>
+            </a:r>
+            <a:r>
+              <a:rPr sz="1400" b="0" i="0">
+                <a:solidFill>
+                  <a:srgbClr val="47525F"/>
+                </a:solidFill>
+                <a:latin typeface="Arial"/>
+              </a:rPr>
+              <a:t> 2022;25(7):1218–26. PMID 35779943</a:t>
+            </a:r>
+          </a:p>
+        </p:txBody>
+      </p:sp>
+      <p:sp>
+        <p:nvSpPr>
+          <p:cNvPr id="5" name="TextBox 4"/>
+          <p:cNvSpPr txBox="1"/>
+          <p:nvPr/>
+        </p:nvSpPr>
+        <p:spPr>
+          <a:xfrm>
+            <a:off x="6570613" y="1142050"/>
+            <a:ext cx="5068937" cy="2814786"/>
+          </a:xfrm>
+          <a:prstGeom prst="rect">
+            <a:avLst/>
+          </a:prstGeom>
+          <a:noFill/>
+        </p:spPr>
+        <p:txBody>
+          <a:bodyPr wrap="square" lIns="0" rIns="0" tIns="0" bIns="0">
+            <a:spAutoFit/>
+          </a:bodyPr>
+          <a:lstStyle/>
+          <a:p>
+            <a:pPr algn="l" marL="285750" indent="-285750">
+              <a:lnSpc>
+                <a:spcPct val="120800"/>
+              </a:lnSpc>
+              <a:spcAft>
+                <a:spcPts val="400"/>
+              </a:spcAft>
+              <a:buAutoNum type="arabicPeriod" startAt="4"/>
+            </a:pPr>
+            <a:r>
+              <a:rPr sz="1400" b="1" i="0">
+                <a:solidFill>
+                  <a:srgbClr val="10141A"/>
+                </a:solidFill>
+                <a:latin typeface="Arial"/>
+              </a:rPr>
+              <a:t>Chugh Y, Jyani G, Kar SS, Rajsekar K, Prinja S, et al.</a:t>
+            </a:r>
+            <a:r>
+              <a:rPr sz="1400" b="0" i="0">
+                <a:solidFill>
+                  <a:srgbClr val="47525F"/>
+                </a:solidFill>
+                <a:latin typeface="Arial"/>
+              </a:rPr>
+              <a:t> Estimating the willingness-to-pay per quality-adjusted life-year to aid health technology assessment in India. </a:t>
+            </a:r>
+            <a:r>
+              <a:rPr sz="1400" b="0" i="1">
+                <a:solidFill>
+                  <a:srgbClr val="47525F"/>
+                </a:solidFill>
+                <a:latin typeface="Arial"/>
+              </a:rPr>
+              <a:t>Value Health</a:t>
+            </a:r>
+            <a:r>
+              <a:rPr sz="1400" b="0" i="0">
+                <a:solidFill>
+                  <a:srgbClr val="47525F"/>
+                </a:solidFill>
+                <a:latin typeface="Arial"/>
+              </a:rPr>
+              <a:t> 2026;29(3):457–66. PMID 41176029</a:t>
+            </a:r>
+          </a:p>
+          <a:p>
+            <a:pPr algn="l" marL="285750" indent="-285750">
+              <a:lnSpc>
+                <a:spcPct val="120800"/>
+              </a:lnSpc>
+              <a:spcAft>
+                <a:spcPts val="400"/>
+              </a:spcAft>
+              <a:buAutoNum type="arabicPeriod" startAt="5"/>
+            </a:pPr>
+            <a:r>
+              <a:rPr sz="1400" b="1" i="0">
+                <a:solidFill>
+                  <a:srgbClr val="10141A"/>
+                </a:solidFill>
+                <a:latin typeface="Arial"/>
+              </a:rPr>
+              <a:t>Chauhan AS, Prinja S, Srinivasan R, et al.</a:t>
+            </a:r>
+            <a:r>
+              <a:rPr sz="1400" b="0" i="0">
+                <a:solidFill>
+                  <a:srgbClr val="47525F"/>
+                </a:solidFill>
+                <a:latin typeface="Arial"/>
+              </a:rPr>
+              <a:t> Cost effectiveness of strategies for cervical cancer prevention in India. </a:t>
+            </a:r>
+            <a:r>
+              <a:rPr sz="1400" b="0" i="1">
+                <a:solidFill>
+                  <a:srgbClr val="47525F"/>
+                </a:solidFill>
+                <a:latin typeface="Arial"/>
+              </a:rPr>
+              <a:t>PLoS One</a:t>
+            </a:r>
+            <a:r>
+              <a:rPr sz="1400" b="0" i="0">
+                <a:solidFill>
+                  <a:srgbClr val="47525F"/>
+                </a:solidFill>
+                <a:latin typeface="Arial"/>
+              </a:rPr>
+              <a:t> 2020;15(9):e0238291. PMID 32870941</a:t>
+            </a:r>
+          </a:p>
+          <a:p>
+            <a:pPr algn="l" marL="285750" indent="-285750">
+              <a:lnSpc>
+                <a:spcPct val="120800"/>
+              </a:lnSpc>
+              <a:spcAft>
+                <a:spcPts val="400"/>
+              </a:spcAft>
+              <a:buAutoNum type="arabicPeriod" startAt="6"/>
+            </a:pPr>
+            <a:r>
+              <a:rPr sz="1400" b="0" i="0">
+                <a:solidFill>
+                  <a:srgbClr val="47525F"/>
+                </a:solidFill>
+                <a:latin typeface="Arial"/>
+              </a:rPr>
+              <a:t>The five-strategy ranking table is </a:t>
+            </a:r>
+            <a:r>
+              <a:rPr sz="1400" b="1" i="0">
+                <a:solidFill>
+                  <a:srgbClr val="10141A"/>
+                </a:solidFill>
+                <a:latin typeface="Arial"/>
+              </a:rPr>
+              <a:t>constructed for teaching</a:t>
+            </a:r>
+            <a:r>
+              <a:rPr sz="1400" b="0" i="0">
+                <a:solidFill>
+                  <a:srgbClr val="47525F"/>
+                </a:solidFill>
+                <a:latin typeface="Arial"/>
+              </a:rPr>
+              <a:t>, built so that simple dominance, extended dominance and a frontier all appear at once. No single published Indian paper shows all three cleanly.</a:t>
+            </a:r>
+          </a:p>
+        </p:txBody>
+      </p:sp>
+    </p:spTree>
+  </p:cSld>
+  <p:clrMapOvr>
+    <a:masterClrMapping/>
+  </p:clrMapOvr>
+</p:sld>
+</file>
+
+<file path=ppt/slides/slide26.xml><?xml version="1.0" encoding="utf-8"?>
+<p:sld xmlns:a="http://schemas.openxmlformats.org/drawingml/2006/main" xmlns:p="http://schemas.openxmlformats.org/presentationml/2006/main" xmlns:r="http://schemas.openxmlformats.org/officeDocument/2006/relationships">
+  <p:cSld>
+    <p:spTree>
+      <p:nvGrpSpPr>
+        <p:cNvPr id="1" name=""/>
+        <p:cNvGrpSpPr/>
+        <p:nvPr/>
+      </p:nvGrpSpPr>
+      <p:grpSpPr/>
+      <p:sp>
+        <p:nvSpPr>
           <p:cNvPr id="2" name="TextBox 1"/>
           <p:cNvSpPr txBox="1"/>
           <p:nvPr/>
@@ -15824,7 +16596,7 @@
                 </a:solidFill>
                 <a:latin typeface="Arial"/>
               </a:rPr>
-              <a:t>FACULTY WORKSHOP · SESSION 8 · HANDLING UNCERTAINTY</a:t>
+              <a:t>FACULTY WORKSHOP · SESSION 6 · DRUMMOND 4TH ED., CHAPTER 2</a:t>
             </a:r>
           </a:p>
         </p:txBody>
@@ -15867,7 +16639,7 @@
                 </a:solidFill>
                 <a:latin typeface="Arial"/>
               </a:rPr>
-              <a:t>Every number in that table</a:t>
+              <a:t>Where does</a:t>
             </a:r>
           </a:p>
           <a:p>
@@ -15887,7 +16659,16 @@
                 </a:solidFill>
                 <a:latin typeface="Arial"/>
               </a:rPr>
-              <a:t>was an estimate</a:t>
+              <a:t>λ</a:t>
+            </a:r>
+            <a:r>
+              <a:rPr sz="5400" b="1" i="0" spc="-81">
+                <a:solidFill>
+                  <a:srgbClr val="162A6C"/>
+                </a:solidFill>
+                <a:latin typeface="Arial"/>
+              </a:rPr>
+              <a:t> come from?</a:t>
             </a:r>
           </a:p>
         </p:txBody>
@@ -15901,7 +16682,7 @@
         <p:spPr>
           <a:xfrm>
             <a:off x="914400" y="2207808"/>
-            <a:ext cx="10363200" cy="1542157"/>
+            <a:ext cx="10363200" cy="2056209"/>
           </a:xfrm>
           <a:prstGeom prst="rect">
             <a:avLst/>
@@ -15930,7 +16711,7 @@
                 </a:solidFill>
                 <a:latin typeface="Arial"/>
               </a:rPr>
-              <a:t>One-way and probabilistic sensitivity analysis, the tornado diagram, the cloud, and the cost-effectiveness acceptability curve.</a:t>
+              <a:t>You have just ranked five strategies against a threshold you were handed. The next session asks who set it, by which of two incompatible methods, and what follows when the two disagree.</a:t>
             </a:r>
           </a:p>
         </p:txBody>
@@ -15943,7 +16724,7 @@
         </p:nvSpPr>
         <p:spPr>
           <a:xfrm>
-            <a:off x="914400" y="4029167"/>
+            <a:off x="914400" y="4543219"/>
             <a:ext cx="10363200" cy="781645"/>
           </a:xfrm>
           <a:prstGeom prst="rect">
@@ -15973,7 +16754,7 @@
                 </a:solidFill>
                 <a:latin typeface="Arial"/>
               </a:rPr>
-              <a:t>The ICER you just computed is a point estimate. The next block is about how much to trust it.</a:t>
+              <a:t>Also: opportunity cost, league tables, and budget impact, the question a finance department asks that an ICER does not answer.</a:t>
             </a:r>
           </a:p>
         </p:txBody>
@@ -19603,7 +20384,7 @@
         <p:spPr>
           <a:xfrm>
             <a:off x="552450" y="4455708"/>
-            <a:ext cx="11087100" cy="781645"/>
+            <a:ext cx="11087100" cy="1172468"/>
           </a:xfrm>
           <a:prstGeom prst="rect">
             <a:avLst/>
@@ -19632,7 +20413,7 @@
                 </a:solidFill>
                 <a:latin typeface="Arial"/>
               </a:rPr>
-              <a:t>Recall Block 2: the Indian league table mixed 70% DALY studies with 30% QALY studies. Now you know why that table cannot be read straight down the column.</a:t>
+              <a:t>Session 6 puts up an Indian league table that mixes 70% DALY studies with 30% QALY studies. Remember this slide when you see it: that is why the table cannot be read straight down the column.</a:t>
             </a:r>
           </a:p>
         </p:txBody>

--- a/slides/block3b.pptx
+++ b/slides/block3b.pptx
@@ -5635,7 +5635,7 @@
         <p:spPr>
           <a:xfrm>
             <a:off x="552450" y="1162050"/>
-            <a:ext cx="11106150" cy="4114800"/>
+            <a:ext cx="11106150" cy="3733800"/>
           </a:xfrm>
           <a:prstGeom prst="rect">
             <a:avLst/>
@@ -5650,7 +5650,7 @@
         </p:nvSpPr>
         <p:spPr>
           <a:xfrm>
-            <a:off x="552450" y="5316828"/>
+            <a:off x="552450" y="4935828"/>
             <a:ext cx="11087100" cy="781645"/>
           </a:xfrm>
           <a:prstGeom prst="rect">
@@ -5711,7 +5711,7 @@
         </p:nvSpPr>
         <p:spPr>
           <a:xfrm>
-            <a:off x="552450" y="6258074"/>
+            <a:off x="552450" y="5950595"/>
             <a:ext cx="11087100" cy="9525"/>
           </a:xfrm>
           <a:prstGeom prst="rect">
@@ -5755,8 +5755,8 @@
         </p:nvSpPr>
         <p:spPr>
           <a:xfrm>
-            <a:off x="552450" y="6326894"/>
-            <a:ext cx="11087100" cy="258098"/>
+            <a:off x="552450" y="6196551"/>
+            <a:ext cx="10420350" cy="248692"/>
           </a:xfrm>
           <a:prstGeom prst="rect">
             <a:avLst/>
@@ -5799,6 +5799,30 @@
           </a:p>
         </p:txBody>
       </p:sp>
+      <p:pic>
+        <p:nvPicPr>
+          <p:cNvPr id="8" name="Picture 7" descr="block3b-10-1.png"/>
+          <p:cNvPicPr>
+            <a:picLocks noChangeAspect="1"/>
+          </p:cNvPicPr>
+          <p:nvPr/>
+        </p:nvPicPr>
+        <p:blipFill>
+          <a:blip r:embed="rId3"/>
+          <a:stretch>
+            <a:fillRect/>
+          </a:stretch>
+        </p:blipFill>
+        <p:spPr>
+          <a:xfrm>
+            <a:off x="11144250" y="6137672"/>
+            <a:ext cx="495300" cy="495300"/>
+          </a:xfrm>
+          <a:prstGeom prst="rect">
+            <a:avLst/>
+          </a:prstGeom>
+        </p:spPr>
+      </p:pic>
     </p:spTree>
   </p:cSld>
   <p:clrMapOvr>
@@ -12385,7 +12409,7 @@
         <p:spPr>
           <a:xfrm>
             <a:off x="552450" y="1162050"/>
-            <a:ext cx="11106150" cy="4114800"/>
+            <a:ext cx="11106150" cy="3733800"/>
           </a:xfrm>
           <a:prstGeom prst="rect">
             <a:avLst/>
@@ -12400,7 +12424,7 @@
         </p:nvSpPr>
         <p:spPr>
           <a:xfrm>
-            <a:off x="552450" y="5316828"/>
+            <a:off x="552450" y="4935828"/>
             <a:ext cx="11087100" cy="781645"/>
           </a:xfrm>
           <a:prstGeom prst="rect">
@@ -12443,7 +12467,7 @@
         </p:nvSpPr>
         <p:spPr>
           <a:xfrm>
-            <a:off x="552450" y="6258074"/>
+            <a:off x="552450" y="5950595"/>
             <a:ext cx="11087100" cy="9525"/>
           </a:xfrm>
           <a:prstGeom prst="rect">
@@ -12487,8 +12511,8 @@
         </p:nvSpPr>
         <p:spPr>
           <a:xfrm>
-            <a:off x="552450" y="6326894"/>
-            <a:ext cx="11087100" cy="258098"/>
+            <a:off x="552450" y="6196551"/>
+            <a:ext cx="10420350" cy="248692"/>
           </a:xfrm>
           <a:prstGeom prst="rect">
             <a:avLst/>
@@ -12531,6 +12555,30 @@
           </a:p>
         </p:txBody>
       </p:sp>
+      <p:pic>
+        <p:nvPicPr>
+          <p:cNvPr id="8" name="Picture 7" descr="block3b-19-1.png"/>
+          <p:cNvPicPr>
+            <a:picLocks noChangeAspect="1"/>
+          </p:cNvPicPr>
+          <p:nvPr/>
+        </p:nvPicPr>
+        <p:blipFill>
+          <a:blip r:embed="rId3"/>
+          <a:stretch>
+            <a:fillRect/>
+          </a:stretch>
+        </p:blipFill>
+        <p:spPr>
+          <a:xfrm>
+            <a:off x="11144250" y="6137672"/>
+            <a:ext cx="495300" cy="495300"/>
+          </a:xfrm>
+          <a:prstGeom prst="rect">
+            <a:avLst/>
+          </a:prstGeom>
+        </p:spPr>
+      </p:pic>
     </p:spTree>
   </p:cSld>
   <p:clrMapOvr>
@@ -18068,7 +18116,7 @@
         <p:spPr>
           <a:xfrm>
             <a:off x="552450" y="1162050"/>
-            <a:ext cx="11106150" cy="4114800"/>
+            <a:ext cx="11106150" cy="3733800"/>
           </a:xfrm>
           <a:prstGeom prst="rect">
             <a:avLst/>
@@ -18083,7 +18131,7 @@
         </p:nvSpPr>
         <p:spPr>
           <a:xfrm>
-            <a:off x="552450" y="5316828"/>
+            <a:off x="552450" y="4935828"/>
             <a:ext cx="11087100" cy="781645"/>
           </a:xfrm>
           <a:prstGeom prst="rect">
@@ -18144,7 +18192,7 @@
         </p:nvSpPr>
         <p:spPr>
           <a:xfrm>
-            <a:off x="552450" y="6258074"/>
+            <a:off x="552450" y="5950595"/>
             <a:ext cx="11087100" cy="9525"/>
           </a:xfrm>
           <a:prstGeom prst="rect">
@@ -18188,8 +18236,8 @@
         </p:nvSpPr>
         <p:spPr>
           <a:xfrm>
-            <a:off x="552450" y="6326894"/>
-            <a:ext cx="11087100" cy="258098"/>
+            <a:off x="552450" y="6196551"/>
+            <a:ext cx="10420350" cy="248692"/>
           </a:xfrm>
           <a:prstGeom prst="rect">
             <a:avLst/>
@@ -18232,6 +18280,30 @@
           </a:p>
         </p:txBody>
       </p:sp>
+      <p:pic>
+        <p:nvPicPr>
+          <p:cNvPr id="8" name="Picture 7" descr="block3b-5-1.png"/>
+          <p:cNvPicPr>
+            <a:picLocks noChangeAspect="1"/>
+          </p:cNvPicPr>
+          <p:nvPr/>
+        </p:nvPicPr>
+        <p:blipFill>
+          <a:blip r:embed="rId3"/>
+          <a:stretch>
+            <a:fillRect/>
+          </a:stretch>
+        </p:blipFill>
+        <p:spPr>
+          <a:xfrm>
+            <a:off x="11144250" y="6137672"/>
+            <a:ext cx="495300" cy="495300"/>
+          </a:xfrm>
+          <a:prstGeom prst="rect">
+            <a:avLst/>
+          </a:prstGeom>
+        </p:spPr>
+      </p:pic>
     </p:spTree>
   </p:cSld>
   <p:clrMapOvr>
